--- a/meu-projeto/MODELO PPT ENCIBRAC 2026 FINAL.pptx
+++ b/meu-projeto/MODELO PPT ENCIBRAC 2026 FINAL.pptx
@@ -5413,7 +5413,7 @@
                 <a:latin typeface="Verdana" panose="020B0604030504040204" pitchFamily="34" charset="0"/>
                 <a:ea typeface="ＭＳ Ｐゴシック" panose="020B0600070205080204" pitchFamily="34" charset="-128"/>
               </a:rPr>
-              <a:t>2026.1</a:t>
+              <a:t>2026.2</a:t>
             </a:r>
           </a:p>
         </p:txBody>
